--- a/Schools_ML_Track/camp_2026/slides/DA/DA03.pptx
+++ b/Schools_ML_Track/camp_2026/slides/DA/DA03.pptx
@@ -128,7 +128,7 @@
   <p:extLst>
     <p:ext uri="{521415D9-36F7-43E2-AB2F-B90AF26B5E84}">
       <p14:sectionLst xmlns:p14="http://schemas.microsoft.com/office/powerpoint/2010/main">
-        <p14:section name="Opening" id="{70099a66-a311-a27b-a523-e4ec1e945a99}">
+        <p14:section name="Opening" id="{082c219b-5acc-5605-8389-5d743c83d767}">
           <p14:sldIdLst>
             <p14:sldId id="256"/>
             <p14:sldId id="257"/>
@@ -139,7 +139,7 @@
             <p14:sldId id="262"/>
           </p14:sldIdLst>
         </p14:section>
-        <p14:section name="Block A" id="{15d2afa7-dd37-f27d-1d43-e4d53a920dfe}">
+        <p14:section name="Block A" id="{4038b32b-5a6d-28b7-6eeb-d5bc979da88d}">
           <p14:sldIdLst>
             <p14:sldId id="263"/>
             <p14:sldId id="264"/>
@@ -149,15 +149,15 @@
             <p14:sldId id="269"/>
           </p14:sldIdLst>
         </p14:section>
-        <p14:section name="Break" id="{a305d6c9-8455-6ba7-319b-9ee9b5d7e829}">
+        <p14:section name="Break" id="{d5418039-d5aa-57c3-02c0-5318d02a4b30}">
           <p14:sldIdLst>
             <p14:sldId id="267"/>
           </p14:sldIdLst>
         </p14:section>
-        <p14:section name="Block A" id="{6f56a75e-e268-49bf-ad11-82ac7e8e5eba}">
+        <p14:section name="Block A" id="{9d67c046-d57e-0801-de0a-b41a1be8ed15}">
           <p14:sldIdLst/>
         </p14:section>
-        <p14:section name="Block B" id="{fe995b7a-c66f-2f54-4f7a-43bf9538b092}">
+        <p14:section name="Block B" id="{1ef4b7b8-c21f-a8ef-4dd2-56ef6b90f6a8}">
           <p14:sldIdLst>
             <p14:sldId id="270"/>
             <p14:sldId id="271"/>
@@ -166,7 +166,7 @@
             <p14:sldId id="274"/>
           </p14:sldIdLst>
         </p14:section>
-        <p14:section name="Make and close" id="{9f451665-ba5a-886a-1da6-fa1ed73b6bed}">
+        <p14:section name="Make and close" id="{53319e1c-5cc0-797e-1999-b33ab1e4024d}">
           <p14:sldIdLst>
             <p14:sldId id="275"/>
             <p14:sldId id="276"/>

--- a/Schools_ML_Track/camp_2026/slides/DA/DA03.pptx
+++ b/Schools_ML_Track/camp_2026/slides/DA/DA03.pptx
@@ -128,7 +128,7 @@
   <p:extLst>
     <p:ext uri="{521415D9-36F7-43E2-AB2F-B90AF26B5E84}">
       <p14:sectionLst xmlns:p14="http://schemas.microsoft.com/office/powerpoint/2010/main">
-        <p14:section name="Opening" id="{082c219b-5acc-5605-8389-5d743c83d767}">
+        <p14:section name="Opening" id="{277aab02-2ec0-f018-1be5-608386d365bb}">
           <p14:sldIdLst>
             <p14:sldId id="256"/>
             <p14:sldId id="257"/>
@@ -139,7 +139,7 @@
             <p14:sldId id="262"/>
           </p14:sldIdLst>
         </p14:section>
-        <p14:section name="Block A" id="{4038b32b-5a6d-28b7-6eeb-d5bc979da88d}">
+        <p14:section name="Block A" id="{c2c6d709-6cf8-52e6-52c5-c6ed4826c923}">
           <p14:sldIdLst>
             <p14:sldId id="263"/>
             <p14:sldId id="264"/>
@@ -149,15 +149,15 @@
             <p14:sldId id="269"/>
           </p14:sldIdLst>
         </p14:section>
-        <p14:section name="Break" id="{d5418039-d5aa-57c3-02c0-5318d02a4b30}">
+        <p14:section name="Break" id="{6735c76a-cf63-be9d-4218-ff1c40cc502e}">
           <p14:sldIdLst>
             <p14:sldId id="267"/>
           </p14:sldIdLst>
         </p14:section>
-        <p14:section name="Block A" id="{9d67c046-d57e-0801-de0a-b41a1be8ed15}">
+        <p14:section name="Block A" id="{211969d6-12ed-6831-ac46-08a32fb88a8b}">
           <p14:sldIdLst/>
         </p14:section>
-        <p14:section name="Block B" id="{1ef4b7b8-c21f-a8ef-4dd2-56ef6b90f6a8}">
+        <p14:section name="Block B" id="{acb6ae5d-7b6a-4ac2-5de9-ec5550954e32}">
           <p14:sldIdLst>
             <p14:sldId id="270"/>
             <p14:sldId id="271"/>
@@ -166,7 +166,7 @@
             <p14:sldId id="274"/>
           </p14:sldIdLst>
         </p14:section>
-        <p14:section name="Make and close" id="{53319e1c-5cc0-797e-1999-b33ab1e4024d}">
+        <p14:section name="Make and close" id="{8eaa4c70-24ce-e601-2b61-b5687944adf5}">
           <p14:sldIdLst>
             <p14:sldId id="275"/>
             <p14:sldId id="276"/>
@@ -3197,7 +3197,24 @@
                 <a:ea typeface="Lato" pitchFamily="34" charset="-122"/>
                 <a:cs typeface="Lato" pitchFamily="34" charset="-120"/>
               </a:rPr>
-              <a:t>Arithmetic, revenue and reading errors</a:t>
+              <a:t>Arithmetic, revenue</a:t>
+            </a:r>
+            <a:endParaRPr lang="en-US" sz="5600" dirty="0"/>
+          </a:p>
+          <a:p>
+            <a:pPr algn="l" indent="0" marL="0">
+              <a:buNone/>
+            </a:pPr>
+            <a:r>
+              <a:rPr lang="en-US" sz="5600" b="1" dirty="0">
+                <a:solidFill>
+                  <a:srgbClr val="FFFFFF"/>
+                </a:solidFill>
+                <a:latin typeface="Lato" pitchFamily="34" charset="0"/>
+                <a:ea typeface="Lato" pitchFamily="34" charset="-122"/>
+                <a:cs typeface="Lato" pitchFamily="34" charset="-120"/>
+              </a:rPr>
+              <a:t>and reading errors</a:t>
             </a:r>
             <a:endParaRPr lang="en-US" sz="5600" dirty="0"/>
           </a:p>
@@ -6286,15 +6303,15 @@
           <a:p>
             <a:pPr algn="l" indent="0" marL="0">
               <a:lnSpc>
-                <a:spcPts val="3600"/>
+                <a:spcPts val="3240"/>
               </a:lnSpc>
               <a:spcAft>
-                <a:spcPts val="2520"/>
+                <a:spcPts val="2020"/>
               </a:spcAft>
               <a:buNone/>
             </a:pPr>
             <a:r>
-              <a:rPr lang="en-US" sz="3000" dirty="0">
+              <a:rPr lang="en-US" sz="2700" dirty="0">
                 <a:solidFill>
                   <a:srgbClr val="111111"/>
                 </a:solidFill>
@@ -6302,22 +6319,22 @@
                 <a:ea typeface="Lato" pitchFamily="34" charset="-122"/>
                 <a:cs typeface="Lato" pitchFamily="34" charset="-120"/>
               </a:rPr>
-              <a:t>Convert the text "12.5" to a number and calculate the price of four items at that price. Predict the result before you run it. Write one sentence on why division by zero cannot be answered.</a:t>
-            </a:r>
-            <a:endParaRPr lang="en-US" sz="3000" dirty="0"/>
-          </a:p>
-          <a:p>
-            <a:pPr algn="l" indent="0" marL="0">
-              <a:lnSpc>
-                <a:spcPts val="3600"/>
+              <a:t>Convert the text "12.5" to a number and calculate the price of four items at that price.</a:t>
+            </a:r>
+            <a:endParaRPr lang="en-US" sz="2700" dirty="0"/>
+          </a:p>
+          <a:p>
+            <a:pPr algn="l" indent="0" marL="0">
+              <a:lnSpc>
+                <a:spcPts val="3240"/>
               </a:lnSpc>
               <a:spcAft>
-                <a:spcPts val="2520"/>
+                <a:spcPts val="2020"/>
               </a:spcAft>
               <a:buNone/>
             </a:pPr>
             <a:r>
-              <a:rPr lang="en-US" sz="3000" dirty="0">
+              <a:rPr lang="en-US" sz="2700" dirty="0">
                 <a:solidFill>
                   <a:srgbClr val="111111"/>
                 </a:solidFill>
@@ -6325,9 +6342,55 @@
                 <a:ea typeface="Lato" pitchFamily="34" charset="-122"/>
                 <a:cs typeface="Lato" pitchFamily="34" charset="-120"/>
               </a:rPr>
+              <a:t>Predict the result before you run it.</a:t>
+            </a:r>
+            <a:endParaRPr lang="en-US" sz="2700" dirty="0"/>
+          </a:p>
+          <a:p>
+            <a:pPr algn="l" indent="0" marL="0">
+              <a:lnSpc>
+                <a:spcPts val="3240"/>
+              </a:lnSpc>
+              <a:spcAft>
+                <a:spcPts val="2020"/>
+              </a:spcAft>
+              <a:buNone/>
+            </a:pPr>
+            <a:r>
+              <a:rPr lang="en-US" sz="2700" dirty="0">
+                <a:solidFill>
+                  <a:srgbClr val="111111"/>
+                </a:solidFill>
+                <a:latin typeface="Lato" pitchFamily="34" charset="0"/>
+                <a:ea typeface="Lato" pitchFamily="34" charset="-122"/>
+                <a:cs typeface="Lato" pitchFamily="34" charset="-120"/>
+              </a:rPr>
+              <a:t>Write one sentence on why division by zero cannot be answered.</a:t>
+            </a:r>
+            <a:endParaRPr lang="en-US" sz="2700" dirty="0"/>
+          </a:p>
+          <a:p>
+            <a:pPr algn="l" indent="0" marL="0">
+              <a:lnSpc>
+                <a:spcPts val="3240"/>
+              </a:lnSpc>
+              <a:spcAft>
+                <a:spcPts val="2020"/>
+              </a:spcAft>
+              <a:buNone/>
+            </a:pPr>
+            <a:r>
+              <a:rPr lang="en-US" sz="2700" dirty="0">
+                <a:solidFill>
+                  <a:srgbClr val="111111"/>
+                </a:solidFill>
+                <a:latin typeface="Lato" pitchFamily="34" charset="0"/>
+                <a:ea typeface="Lato" pitchFamily="34" charset="-122"/>
+                <a:cs typeface="Lato" pitchFamily="34" charset="-120"/>
+              </a:rPr>
               <a:t>Save it as DA03. Write two sentences: what you changed and how you checked it.</a:t>
             </a:r>
-            <a:endParaRPr lang="en-US" sz="3000" dirty="0"/>
+            <a:endParaRPr lang="en-US" sz="2700" dirty="0"/>
           </a:p>
         </p:txBody>
       </p:sp>
@@ -7506,9 +7569,33 @@
           </a:ln>
         </p:spPr>
       </p:sp>
-      <p:sp>
-        <p:nvSpPr>
-          <p:cNvPr id="8" name="Text 5"/>
+      <p:pic>
+        <p:nvPicPr>
+          <p:cNvPr id="8" name="Image 1" descr="expression">    </p:cNvPr>
+          <p:cNvPicPr>
+            <a:picLocks noChangeAspect="1"/>
+          </p:cNvPicPr>
+          <p:nvPr/>
+        </p:nvPicPr>
+        <p:blipFill>
+          <a:blip r:embed="rId2"/>
+          <a:stretch>
+            <a:fillRect/>
+          </a:stretch>
+        </p:blipFill>
+        <p:spPr>
+          <a:xfrm>
+            <a:off x="640080" y="3264408"/>
+            <a:ext cx="1188720" cy="1188720"/>
+          </a:xfrm>
+          <a:prstGeom prst="rect">
+            <a:avLst/>
+          </a:prstGeom>
+        </p:spPr>
+      </p:pic>
+      <p:sp>
+        <p:nvSpPr>
+          <p:cNvPr id="9" name="Text 5"/>
           <p:cNvSpPr txBox="1"/>
           <p:nvPr/>
         </p:nvSpPr>
@@ -7550,7 +7637,7 @@
       </p:sp>
       <p:sp>
         <p:nvSpPr>
-          <p:cNvPr id="9" name="Text 6"/>
+          <p:cNvPr id="10" name="Text 6"/>
           <p:cNvSpPr txBox="1"/>
           <p:nvPr/>
         </p:nvSpPr>
@@ -7592,7 +7679,7 @@
       </p:sp>
       <p:sp>
         <p:nvSpPr>
-          <p:cNvPr id="10" name="Text 7"/>
+          <p:cNvPr id="11" name="Text 7"/>
           <p:cNvSpPr txBox="1"/>
           <p:nvPr/>
         </p:nvSpPr>
@@ -7634,7 +7721,7 @@
       </p:sp>
       <p:sp>
         <p:nvSpPr>
-          <p:cNvPr id="11" name="Shape 8"/>
+          <p:cNvPr id="12" name="Shape 8"/>
           <p:cNvSpPr/>
           <p:nvPr/>
         </p:nvSpPr>
@@ -7655,9 +7742,33 @@
           </a:ln>
         </p:spPr>
       </p:sp>
-      <p:sp>
-        <p:nvSpPr>
-          <p:cNvPr id="12" name="Text 9"/>
+      <p:pic>
+        <p:nvPicPr>
+          <p:cNvPr id="13" name="Image 2" descr="order of operations">    </p:cNvPr>
+          <p:cNvPicPr>
+            <a:picLocks noChangeAspect="1"/>
+          </p:cNvPicPr>
+          <p:nvPr/>
+        </p:nvPicPr>
+        <p:blipFill>
+          <a:blip r:embed="rId3"/>
+          <a:stretch>
+            <a:fillRect/>
+          </a:stretch>
+        </p:blipFill>
+        <p:spPr>
+          <a:xfrm>
+            <a:off x="640080" y="4745736"/>
+            <a:ext cx="1188720" cy="1188720"/>
+          </a:xfrm>
+          <a:prstGeom prst="rect">
+            <a:avLst/>
+          </a:prstGeom>
+        </p:spPr>
+      </p:pic>
+      <p:sp>
+        <p:nvSpPr>
+          <p:cNvPr id="14" name="Text 9"/>
           <p:cNvSpPr txBox="1"/>
           <p:nvPr/>
         </p:nvSpPr>
@@ -7699,7 +7810,7 @@
       </p:sp>
       <p:sp>
         <p:nvSpPr>
-          <p:cNvPr id="13" name="Text 10"/>
+          <p:cNvPr id="15" name="Text 10"/>
           <p:cNvSpPr txBox="1"/>
           <p:nvPr/>
         </p:nvSpPr>
@@ -7741,7 +7852,7 @@
       </p:sp>
       <p:sp>
         <p:nvSpPr>
-          <p:cNvPr id="14" name="Text 11"/>
+          <p:cNvPr id="16" name="Text 11"/>
           <p:cNvSpPr txBox="1"/>
           <p:nvPr/>
         </p:nvSpPr>
